--- a/resources/presentations/Lunch-Is-Packed-Module-03-sustainable-lunch-choices.pptx
+++ b/resources/presentations/Lunch-Is-Packed-Module-03-sustainable-lunch-choices.pptx
@@ -2,20 +2,20 @@
 <file path=ppt/presentation.xml><?xml version="1.0" encoding="utf-8"?>
 <p:presentation xmlns:p="http://schemas.openxmlformats.org/presentationml/2006/main">
   <p:sldMasterIdLst>
-    <p:sldMasterId xmlns:r="http://schemas.openxmlformats.org/officeDocument/2006/relationships" id="2147483648" r:id="Reed7110798714176"/>
+    <p:sldMasterId xmlns:r="http://schemas.openxmlformats.org/officeDocument/2006/relationships" id="2147483648" r:id="R20d27db0aab5434c"/>
   </p:sldMasterIdLst>
   <p:notesMasterIdLst>
-    <p:notesMasterId xmlns:r="http://schemas.openxmlformats.org/officeDocument/2006/relationships" r:id="Rb6affdf17cf6408a"/>
+    <p:notesMasterId xmlns:r="http://schemas.openxmlformats.org/officeDocument/2006/relationships" r:id="R25fc5077d85c4887"/>
   </p:notesMasterIdLst>
   <p:sldIdLst>
-    <p:sldId xmlns:r="http://schemas.openxmlformats.org/officeDocument/2006/relationships" id="256" r:id="R0d8e8582f0374e05"/>
-    <p:sldId xmlns:r="http://schemas.openxmlformats.org/officeDocument/2006/relationships" id="257" r:id="Rc8922cc3c1ab4200"/>
-    <p:sldId xmlns:r="http://schemas.openxmlformats.org/officeDocument/2006/relationships" id="258" r:id="Rb3c0e3c696e34e43"/>
-    <p:sldId xmlns:r="http://schemas.openxmlformats.org/officeDocument/2006/relationships" id="259" r:id="R49efeb6737184983"/>
-    <p:sldId xmlns:r="http://schemas.openxmlformats.org/officeDocument/2006/relationships" id="260" r:id="Rf296a768febf4fa8"/>
-    <p:sldId xmlns:r="http://schemas.openxmlformats.org/officeDocument/2006/relationships" id="261" r:id="R16ccc6c5dd3c4266"/>
-    <p:sldId xmlns:r="http://schemas.openxmlformats.org/officeDocument/2006/relationships" id="262" r:id="R8f45518ffcf74270"/>
-    <p:sldId xmlns:r="http://schemas.openxmlformats.org/officeDocument/2006/relationships" id="263" r:id="R4a4d19d74ecf477d"/>
+    <p:sldId xmlns:r="http://schemas.openxmlformats.org/officeDocument/2006/relationships" id="256" r:id="R9bb07bf7622c4bca"/>
+    <p:sldId xmlns:r="http://schemas.openxmlformats.org/officeDocument/2006/relationships" id="257" r:id="Radd09cb93ac1451c"/>
+    <p:sldId xmlns:r="http://schemas.openxmlformats.org/officeDocument/2006/relationships" id="258" r:id="Ra24e229cedcc4ed9"/>
+    <p:sldId xmlns:r="http://schemas.openxmlformats.org/officeDocument/2006/relationships" id="259" r:id="R037bb5076fdc4a4f"/>
+    <p:sldId xmlns:r="http://schemas.openxmlformats.org/officeDocument/2006/relationships" id="260" r:id="R651ea297dd734ed0"/>
+    <p:sldId xmlns:r="http://schemas.openxmlformats.org/officeDocument/2006/relationships" id="261" r:id="Ra514e74ef52b4089"/>
+    <p:sldId xmlns:r="http://schemas.openxmlformats.org/officeDocument/2006/relationships" id="262" r:id="R04e0a4a283e54dfb"/>
+    <p:sldId xmlns:r="http://schemas.openxmlformats.org/officeDocument/2006/relationships" id="263" r:id="R129527791c964e24"/>
   </p:sldIdLst>
   <p:sldSz cx="12192000" cy="6858000"/>
   <p:notesSz cx="6858000" cy="9144000"/>
@@ -1127,7 +1127,7 @@
   </p:cSld>
   <p:clrMap bg1="lt1" tx1="dk1" bg2="lt2" tx2="dk2" accent1="accent1" accent2="accent2" accent3="accent3" accent4="accent4" accent5="accent5" accent6="accent6" hlink="hlink" folHlink="folHlink"/>
   <p:sldLayoutIdLst>
-    <p:sldLayoutId xmlns:r="http://schemas.openxmlformats.org/officeDocument/2006/relationships" id="2147483649" r:id="Rf32391ed40794eca"/>
+    <p:sldLayoutId xmlns:r="http://schemas.openxmlformats.org/officeDocument/2006/relationships" id="2147483649" r:id="Ree9fb4e45be44723"/>
   </p:sldLayoutIdLst>
   <p:txStyles>
     <p:titleStyle>
@@ -1678,7 +1678,7 @@
           <p:cNvPr id="7" name="title-plane">
             <a:extLst xmlns:a="http://schemas.openxmlformats.org/drawingml/2006/main">
               <a:ext uri="{FF2B5EF4-FFF2-40B4-BE49-F238E27FC236}">
-                <a16:creationId xmlns:a16="http://schemas.microsoft.com/office/drawing/2014/main" id="{5B7E183E-3558-4CCF-801F-80231BC4C16F}"/>
+                <a16:creationId xmlns:a16="http://schemas.microsoft.com/office/drawing/2014/main" id="{2BD7E583-51A3-48E9-9655-05069A445EFC}"/>
               </a:ext>
             </a:extLst>
           </p:cNvPr>
@@ -1713,8 +1713,8 @@
           <p:nvPr/>
         </p:nvPicPr>
         <p:blipFill>
-          <a:blip xmlns:r="http://schemas.openxmlformats.org/officeDocument/2006/relationships" xmlns:a="http://schemas.openxmlformats.org/drawingml/2006/main" r:embed="R055f52e87a5a46ac"/>
-          <a:srcRect xmlns:a="http://schemas.openxmlformats.org/drawingml/2006/main" l="30134" t="0" r="30134" b="0"/>
+          <a:blip xmlns:r="http://schemas.openxmlformats.org/officeDocument/2006/relationships" xmlns:a="http://schemas.openxmlformats.org/drawingml/2006/main" r:embed="Rdb0e93a2061d4496"/>
+          <a:srcRect xmlns:a="http://schemas.openxmlformats.org/drawingml/2006/main" l="24074" t="0" r="24074" b="0"/>
           <a:stretch xmlns:a="http://schemas.openxmlformats.org/drawingml/2006/main">
             <a:fillRect l="0" t="0" r="0" b="0"/>
           </a:stretch>
@@ -1734,7 +1734,7 @@
           <p:cNvPr id="3" name="module-kicker">
             <a:extLst xmlns:a="http://schemas.openxmlformats.org/drawingml/2006/main">
               <a:ext uri="{FF2B5EF4-FFF2-40B4-BE49-F238E27FC236}">
-                <a16:creationId xmlns:a16="http://schemas.microsoft.com/office/drawing/2014/main" id="{98FBE809-D765-4CF1-8DD2-323729AE5B53}"/>
+                <a16:creationId xmlns:a16="http://schemas.microsoft.com/office/drawing/2014/main" id="{1AD0D130-8A99-48BF-9EDD-0DEAA9691149}"/>
               </a:ext>
             </a:extLst>
           </p:cNvPr>
@@ -1784,7 +1784,7 @@
           <p:cNvPr id="4" name="deck-title">
             <a:extLst xmlns:a="http://schemas.openxmlformats.org/drawingml/2006/main">
               <a:ext uri="{FF2B5EF4-FFF2-40B4-BE49-F238E27FC236}">
-                <a16:creationId xmlns:a16="http://schemas.microsoft.com/office/drawing/2014/main" id="{AD9B7B49-8616-438C-A2BF-2E47253EE942}"/>
+                <a16:creationId xmlns:a16="http://schemas.microsoft.com/office/drawing/2014/main" id="{9C8ED956-E085-4092-9B73-B3800CD467D3}"/>
               </a:ext>
             </a:extLst>
           </p:cNvPr>
@@ -1834,7 +1834,7 @@
           <p:cNvPr id="5" name="deck-subtitle">
             <a:extLst xmlns:a="http://schemas.openxmlformats.org/drawingml/2006/main">
               <a:ext uri="{FF2B5EF4-FFF2-40B4-BE49-F238E27FC236}">
-                <a16:creationId xmlns:a16="http://schemas.microsoft.com/office/drawing/2014/main" id="{D22B6C8A-6DFF-4D50-8755-D4DAE9A74433}"/>
+                <a16:creationId xmlns:a16="http://schemas.microsoft.com/office/drawing/2014/main" id="{97861E00-A7D3-4621-9B28-B0301CD7FE63}"/>
               </a:ext>
             </a:extLst>
           </p:cNvPr>
@@ -1884,7 +1884,7 @@
           <p:cNvPr id="6" name="deck-footer">
             <a:extLst xmlns:a="http://schemas.openxmlformats.org/drawingml/2006/main">
               <a:ext uri="{FF2B5EF4-FFF2-40B4-BE49-F238E27FC236}">
-                <a16:creationId xmlns:a16="http://schemas.microsoft.com/office/drawing/2014/main" id="{68F48E42-C911-464C-95EF-89D7BE47A9DB}"/>
+                <a16:creationId xmlns:a16="http://schemas.microsoft.com/office/drawing/2014/main" id="{2497575E-7EB0-484B-9BEC-F7FF3CD9E834}"/>
               </a:ext>
             </a:extLst>
           </p:cNvPr>
@@ -1932,7 +1932,7 @@
     </p:spTree>
     <p:extLst>
       <p:ext uri="{BB962C8B-B14F-4D97-AF65-F5344CB8AC3E}">
-        <p14:creationId xmlns:p14="http://schemas.microsoft.com/office/powerpoint/2010/main" val="2145307768"/>
+        <p14:creationId xmlns:p14="http://schemas.microsoft.com/office/powerpoint/2010/main" val="1237246923"/>
       </p:ext>
     </p:extLst>
   </p:cSld>
@@ -1963,7 +1963,7 @@
           <p:cNvPr id="15" name="top-rule">
             <a:extLst xmlns:a="http://schemas.openxmlformats.org/drawingml/2006/main">
               <a:ext uri="{FF2B5EF4-FFF2-40B4-BE49-F238E27FC236}">
-                <a16:creationId xmlns:a16="http://schemas.microsoft.com/office/drawing/2014/main" id="{C3A7E9C7-2FFB-4BAA-9D5D-F69201858621}"/>
+                <a16:creationId xmlns:a16="http://schemas.microsoft.com/office/drawing/2014/main" id="{A04B6F5D-BA58-4182-85E0-5DAC9A92C8DB}"/>
               </a:ext>
             </a:extLst>
           </p:cNvPr>
@@ -1994,7 +1994,7 @@
           <p:cNvPr id="2" name="course-label">
             <a:extLst xmlns:a="http://schemas.openxmlformats.org/drawingml/2006/main">
               <a:ext uri="{FF2B5EF4-FFF2-40B4-BE49-F238E27FC236}">
-                <a16:creationId xmlns:a16="http://schemas.microsoft.com/office/drawing/2014/main" id="{4C6E60EB-5CD3-45E9-A863-BCBA187754A3}"/>
+                <a16:creationId xmlns:a16="http://schemas.microsoft.com/office/drawing/2014/main" id="{E33E1DE1-035D-4B46-9CBD-2A90DAD09E16}"/>
               </a:ext>
             </a:extLst>
           </p:cNvPr>
@@ -2044,7 +2044,7 @@
           <p:cNvPr id="3" name="module-label">
             <a:extLst xmlns:a="http://schemas.openxmlformats.org/drawingml/2006/main">
               <a:ext uri="{FF2B5EF4-FFF2-40B4-BE49-F238E27FC236}">
-                <a16:creationId xmlns:a16="http://schemas.microsoft.com/office/drawing/2014/main" id="{79AAF8A1-2022-4218-8153-99E108D610DD}"/>
+                <a16:creationId xmlns:a16="http://schemas.microsoft.com/office/drawing/2014/main" id="{0E4F9359-9F22-4C54-A1BB-7DD130100644}"/>
               </a:ext>
             </a:extLst>
           </p:cNvPr>
@@ -2094,7 +2094,7 @@
           <p:cNvPr id="4" name="slide-title">
             <a:extLst xmlns:a="http://schemas.openxmlformats.org/drawingml/2006/main">
               <a:ext uri="{FF2B5EF4-FFF2-40B4-BE49-F238E27FC236}">
-                <a16:creationId xmlns:a16="http://schemas.microsoft.com/office/drawing/2014/main" id="{4EBD7813-472C-416D-83E9-2335D017ED9A}"/>
+                <a16:creationId xmlns:a16="http://schemas.microsoft.com/office/drawing/2014/main" id="{7756D376-236A-4543-BFFF-6EF5C2A10D8C}"/>
               </a:ext>
             </a:extLst>
           </p:cNvPr>
@@ -2144,7 +2144,7 @@
           <p:cNvPr id="5" name="slide-subtitle">
             <a:extLst xmlns:a="http://schemas.openxmlformats.org/drawingml/2006/main">
               <a:ext uri="{FF2B5EF4-FFF2-40B4-BE49-F238E27FC236}">
-                <a16:creationId xmlns:a16="http://schemas.microsoft.com/office/drawing/2014/main" id="{983BB460-D9CA-42E9-8BCC-A6E57143EC67}"/>
+                <a16:creationId xmlns:a16="http://schemas.microsoft.com/office/drawing/2014/main" id="{739A4397-D404-409F-A51E-E9BFD8E727F2}"/>
               </a:ext>
             </a:extLst>
           </p:cNvPr>
@@ -2194,7 +2194,7 @@
           <p:cNvPr id="6" name="bullet-1">
             <a:extLst xmlns:a="http://schemas.openxmlformats.org/drawingml/2006/main">
               <a:ext uri="{FF2B5EF4-FFF2-40B4-BE49-F238E27FC236}">
-                <a16:creationId xmlns:a16="http://schemas.microsoft.com/office/drawing/2014/main" id="{C57B9439-A575-4034-B7FE-57719F78C544}"/>
+                <a16:creationId xmlns:a16="http://schemas.microsoft.com/office/drawing/2014/main" id="{276FD90A-5199-4F32-A65C-1A2D4528053D}"/>
               </a:ext>
             </a:extLst>
           </p:cNvPr>
@@ -2225,7 +2225,7 @@
           <p:cNvPr id="7" name="bullet-number-1">
             <a:extLst xmlns:a="http://schemas.openxmlformats.org/drawingml/2006/main">
               <a:ext uri="{FF2B5EF4-FFF2-40B4-BE49-F238E27FC236}">
-                <a16:creationId xmlns:a16="http://schemas.microsoft.com/office/drawing/2014/main" id="{8C13BC2C-48FF-4F80-9DFA-5D8A6D2D0742}"/>
+                <a16:creationId xmlns:a16="http://schemas.microsoft.com/office/drawing/2014/main" id="{2BC045FD-90D9-48E6-8FC9-207161A7107C}"/>
               </a:ext>
             </a:extLst>
           </p:cNvPr>
@@ -2275,7 +2275,7 @@
           <p:cNvPr id="8" name="bullet-copy-1">
             <a:extLst xmlns:a="http://schemas.openxmlformats.org/drawingml/2006/main">
               <a:ext uri="{FF2B5EF4-FFF2-40B4-BE49-F238E27FC236}">
-                <a16:creationId xmlns:a16="http://schemas.microsoft.com/office/drawing/2014/main" id="{5E82CF21-EE2A-4069-84FC-A124F606B1C6}"/>
+                <a16:creationId xmlns:a16="http://schemas.microsoft.com/office/drawing/2014/main" id="{6988B69D-E4BB-47CA-88EF-890159320381}"/>
               </a:ext>
             </a:extLst>
           </p:cNvPr>
@@ -2325,7 +2325,7 @@
           <p:cNvPr id="9" name="bullet-2">
             <a:extLst xmlns:a="http://schemas.openxmlformats.org/drawingml/2006/main">
               <a:ext uri="{FF2B5EF4-FFF2-40B4-BE49-F238E27FC236}">
-                <a16:creationId xmlns:a16="http://schemas.microsoft.com/office/drawing/2014/main" id="{01CEB260-D1F6-4D7E-8441-961DD466E3E3}"/>
+                <a16:creationId xmlns:a16="http://schemas.microsoft.com/office/drawing/2014/main" id="{BF00D7B8-08CD-4558-919D-A80802ED22CE}"/>
               </a:ext>
             </a:extLst>
           </p:cNvPr>
@@ -2356,7 +2356,7 @@
           <p:cNvPr id="10" name="bullet-number-2">
             <a:extLst xmlns:a="http://schemas.openxmlformats.org/drawingml/2006/main">
               <a:ext uri="{FF2B5EF4-FFF2-40B4-BE49-F238E27FC236}">
-                <a16:creationId xmlns:a16="http://schemas.microsoft.com/office/drawing/2014/main" id="{360BE998-367E-47C4-84B7-7152761611C5}"/>
+                <a16:creationId xmlns:a16="http://schemas.microsoft.com/office/drawing/2014/main" id="{A70FD207-37A6-4394-BEA2-DC816FE6D930}"/>
               </a:ext>
             </a:extLst>
           </p:cNvPr>
@@ -2406,7 +2406,7 @@
           <p:cNvPr id="11" name="bullet-copy-2">
             <a:extLst xmlns:a="http://schemas.openxmlformats.org/drawingml/2006/main">
               <a:ext uri="{FF2B5EF4-FFF2-40B4-BE49-F238E27FC236}">
-                <a16:creationId xmlns:a16="http://schemas.microsoft.com/office/drawing/2014/main" id="{9DD8925D-2018-434E-AAD2-F930A6C8949A}"/>
+                <a16:creationId xmlns:a16="http://schemas.microsoft.com/office/drawing/2014/main" id="{4FF2D696-073A-4550-AD39-503941C01E3C}"/>
               </a:ext>
             </a:extLst>
           </p:cNvPr>
@@ -2456,7 +2456,7 @@
           <p:cNvPr id="12" name="bullet-3">
             <a:extLst xmlns:a="http://schemas.openxmlformats.org/drawingml/2006/main">
               <a:ext uri="{FF2B5EF4-FFF2-40B4-BE49-F238E27FC236}">
-                <a16:creationId xmlns:a16="http://schemas.microsoft.com/office/drawing/2014/main" id="{F09777DE-8CE8-4BA8-BD5B-AFA59101487E}"/>
+                <a16:creationId xmlns:a16="http://schemas.microsoft.com/office/drawing/2014/main" id="{6DC01365-2861-4467-AAA0-142878FB8F75}"/>
               </a:ext>
             </a:extLst>
           </p:cNvPr>
@@ -2487,7 +2487,7 @@
           <p:cNvPr id="13" name="bullet-number-3">
             <a:extLst xmlns:a="http://schemas.openxmlformats.org/drawingml/2006/main">
               <a:ext uri="{FF2B5EF4-FFF2-40B4-BE49-F238E27FC236}">
-                <a16:creationId xmlns:a16="http://schemas.microsoft.com/office/drawing/2014/main" id="{CBB014D1-0CB4-4528-B053-7E3D7ACBC6D6}"/>
+                <a16:creationId xmlns:a16="http://schemas.microsoft.com/office/drawing/2014/main" id="{1EDF8BC3-9ADE-406C-B766-580F99708C39}"/>
               </a:ext>
             </a:extLst>
           </p:cNvPr>
@@ -2537,7 +2537,7 @@
           <p:cNvPr id="14" name="bullet-copy-3">
             <a:extLst xmlns:a="http://schemas.openxmlformats.org/drawingml/2006/main">
               <a:ext uri="{FF2B5EF4-FFF2-40B4-BE49-F238E27FC236}">
-                <a16:creationId xmlns:a16="http://schemas.microsoft.com/office/drawing/2014/main" id="{FD59FA86-0C59-4EA9-8770-26D9168B0177}"/>
+                <a16:creationId xmlns:a16="http://schemas.microsoft.com/office/drawing/2014/main" id="{8D700867-8869-45A9-966F-50580C7A8C50}"/>
               </a:ext>
             </a:extLst>
           </p:cNvPr>
@@ -2585,7 +2585,7 @@
     </p:spTree>
     <p:extLst>
       <p:ext uri="{BB962C8B-B14F-4D97-AF65-F5344CB8AC3E}">
-        <p14:creationId xmlns:p14="http://schemas.microsoft.com/office/powerpoint/2010/main" val="1673383419"/>
+        <p14:creationId xmlns:p14="http://schemas.microsoft.com/office/powerpoint/2010/main" val="730584272"/>
       </p:ext>
     </p:extLst>
   </p:cSld>
@@ -2616,7 +2616,7 @@
           <p:cNvPr id="15" name="top-rule">
             <a:extLst xmlns:a="http://schemas.openxmlformats.org/drawingml/2006/main">
               <a:ext uri="{FF2B5EF4-FFF2-40B4-BE49-F238E27FC236}">
-                <a16:creationId xmlns:a16="http://schemas.microsoft.com/office/drawing/2014/main" id="{2CEFFC5F-508A-45E8-AEFD-14D1E1580E47}"/>
+                <a16:creationId xmlns:a16="http://schemas.microsoft.com/office/drawing/2014/main" id="{E504D55A-6376-4058-8ADF-FB2AD5DFE9DC}"/>
               </a:ext>
             </a:extLst>
           </p:cNvPr>
@@ -2647,7 +2647,7 @@
           <p:cNvPr id="2" name="course-label">
             <a:extLst xmlns:a="http://schemas.openxmlformats.org/drawingml/2006/main">
               <a:ext uri="{FF2B5EF4-FFF2-40B4-BE49-F238E27FC236}">
-                <a16:creationId xmlns:a16="http://schemas.microsoft.com/office/drawing/2014/main" id="{7A722561-6652-4172-BF4F-31D19ED4299F}"/>
+                <a16:creationId xmlns:a16="http://schemas.microsoft.com/office/drawing/2014/main" id="{40EAAA8D-9231-447D-98A7-D076AC9C2ECE}"/>
               </a:ext>
             </a:extLst>
           </p:cNvPr>
@@ -2697,7 +2697,7 @@
           <p:cNvPr id="3" name="module-label">
             <a:extLst xmlns:a="http://schemas.openxmlformats.org/drawingml/2006/main">
               <a:ext uri="{FF2B5EF4-FFF2-40B4-BE49-F238E27FC236}">
-                <a16:creationId xmlns:a16="http://schemas.microsoft.com/office/drawing/2014/main" id="{D82770CB-6729-4937-BFEF-0B120F5DC6E9}"/>
+                <a16:creationId xmlns:a16="http://schemas.microsoft.com/office/drawing/2014/main" id="{B57EAC9B-ACE5-45E9-B192-FC97327B9EF1}"/>
               </a:ext>
             </a:extLst>
           </p:cNvPr>
@@ -2747,7 +2747,7 @@
           <p:cNvPr id="4" name="slide-title">
             <a:extLst xmlns:a="http://schemas.openxmlformats.org/drawingml/2006/main">
               <a:ext uri="{FF2B5EF4-FFF2-40B4-BE49-F238E27FC236}">
-                <a16:creationId xmlns:a16="http://schemas.microsoft.com/office/drawing/2014/main" id="{55FDA173-E2BF-47DE-BF7D-6BEDE7159027}"/>
+                <a16:creationId xmlns:a16="http://schemas.microsoft.com/office/drawing/2014/main" id="{621A4871-6198-4223-8973-A1E45B37860D}"/>
               </a:ext>
             </a:extLst>
           </p:cNvPr>
@@ -2797,7 +2797,7 @@
           <p:cNvPr id="5" name="slide-subtitle">
             <a:extLst xmlns:a="http://schemas.openxmlformats.org/drawingml/2006/main">
               <a:ext uri="{FF2B5EF4-FFF2-40B4-BE49-F238E27FC236}">
-                <a16:creationId xmlns:a16="http://schemas.microsoft.com/office/drawing/2014/main" id="{C556B304-7C47-45CF-88F2-4EF5C667734B}"/>
+                <a16:creationId xmlns:a16="http://schemas.microsoft.com/office/drawing/2014/main" id="{059A179F-ACBE-423E-82FA-FB89BFC3322A}"/>
               </a:ext>
             </a:extLst>
           </p:cNvPr>
@@ -2847,7 +2847,7 @@
           <p:cNvPr id="6" name="bullet-1">
             <a:extLst xmlns:a="http://schemas.openxmlformats.org/drawingml/2006/main">
               <a:ext uri="{FF2B5EF4-FFF2-40B4-BE49-F238E27FC236}">
-                <a16:creationId xmlns:a16="http://schemas.microsoft.com/office/drawing/2014/main" id="{541DC56E-BA55-4E4B-9154-978631C9D53E}"/>
+                <a16:creationId xmlns:a16="http://schemas.microsoft.com/office/drawing/2014/main" id="{F292428C-214A-4EE7-A591-BEE74FC38453}"/>
               </a:ext>
             </a:extLst>
           </p:cNvPr>
@@ -2878,7 +2878,7 @@
           <p:cNvPr id="7" name="bullet-number-1">
             <a:extLst xmlns:a="http://schemas.openxmlformats.org/drawingml/2006/main">
               <a:ext uri="{FF2B5EF4-FFF2-40B4-BE49-F238E27FC236}">
-                <a16:creationId xmlns:a16="http://schemas.microsoft.com/office/drawing/2014/main" id="{FACE23BB-D6E4-4EC8-A867-5850DC43AC72}"/>
+                <a16:creationId xmlns:a16="http://schemas.microsoft.com/office/drawing/2014/main" id="{B64D4EF3-0395-402C-91E6-7F9B8C252F97}"/>
               </a:ext>
             </a:extLst>
           </p:cNvPr>
@@ -2928,7 +2928,7 @@
           <p:cNvPr id="8" name="bullet-copy-1">
             <a:extLst xmlns:a="http://schemas.openxmlformats.org/drawingml/2006/main">
               <a:ext uri="{FF2B5EF4-FFF2-40B4-BE49-F238E27FC236}">
-                <a16:creationId xmlns:a16="http://schemas.microsoft.com/office/drawing/2014/main" id="{F2CF2797-B765-471B-9F25-CF09A2A21DC0}"/>
+                <a16:creationId xmlns:a16="http://schemas.microsoft.com/office/drawing/2014/main" id="{AE122FBF-D8F3-44CF-9E42-4A3D67B6CD62}"/>
               </a:ext>
             </a:extLst>
           </p:cNvPr>
@@ -2978,7 +2978,7 @@
           <p:cNvPr id="9" name="bullet-2">
             <a:extLst xmlns:a="http://schemas.openxmlformats.org/drawingml/2006/main">
               <a:ext uri="{FF2B5EF4-FFF2-40B4-BE49-F238E27FC236}">
-                <a16:creationId xmlns:a16="http://schemas.microsoft.com/office/drawing/2014/main" id="{42C89194-4C73-446F-861F-CCEB2D913256}"/>
+                <a16:creationId xmlns:a16="http://schemas.microsoft.com/office/drawing/2014/main" id="{E21226D5-4517-4857-8262-116DA87D4FE3}"/>
               </a:ext>
             </a:extLst>
           </p:cNvPr>
@@ -3009,7 +3009,7 @@
           <p:cNvPr id="10" name="bullet-number-2">
             <a:extLst xmlns:a="http://schemas.openxmlformats.org/drawingml/2006/main">
               <a:ext uri="{FF2B5EF4-FFF2-40B4-BE49-F238E27FC236}">
-                <a16:creationId xmlns:a16="http://schemas.microsoft.com/office/drawing/2014/main" id="{A0092E6E-96CB-4428-B8AD-F6542B5DF1A7}"/>
+                <a16:creationId xmlns:a16="http://schemas.microsoft.com/office/drawing/2014/main" id="{72D15C91-C2C6-4BCB-A012-6C9F9E51CABE}"/>
               </a:ext>
             </a:extLst>
           </p:cNvPr>
@@ -3059,7 +3059,7 @@
           <p:cNvPr id="11" name="bullet-copy-2">
             <a:extLst xmlns:a="http://schemas.openxmlformats.org/drawingml/2006/main">
               <a:ext uri="{FF2B5EF4-FFF2-40B4-BE49-F238E27FC236}">
-                <a16:creationId xmlns:a16="http://schemas.microsoft.com/office/drawing/2014/main" id="{847BDD36-8C90-45D9-872E-FD4A4AE6ED91}"/>
+                <a16:creationId xmlns:a16="http://schemas.microsoft.com/office/drawing/2014/main" id="{55AECC27-D064-4428-845A-2C5265896F35}"/>
               </a:ext>
             </a:extLst>
           </p:cNvPr>
@@ -3099,7 +3099,7 @@
                   <a:srgbClr val="16343A"/>
                 </a:solidFill>
               </a:rPr>
-              <a:t>Lunches can include plastic bags, wrap, cutlery, drink containers and packets.</a:t>
+              <a:t>It must be used enough times, cared for and kept in service to replace disposable alternatives.</a:t>
             </a:r>
           </a:p>
         </p:txBody>
@@ -3109,7 +3109,7 @@
           <p:cNvPr id="12" name="bullet-3">
             <a:extLst xmlns:a="http://schemas.openxmlformats.org/drawingml/2006/main">
               <a:ext uri="{FF2B5EF4-FFF2-40B4-BE49-F238E27FC236}">
-                <a16:creationId xmlns:a16="http://schemas.microsoft.com/office/drawing/2014/main" id="{276BF1F4-8D8D-441B-89AD-6BF7773E7D05}"/>
+                <a16:creationId xmlns:a16="http://schemas.microsoft.com/office/drawing/2014/main" id="{36C64C3F-D031-49A4-8D35-087D43A2FF49}"/>
               </a:ext>
             </a:extLst>
           </p:cNvPr>
@@ -3140,7 +3140,7 @@
           <p:cNvPr id="13" name="bullet-number-3">
             <a:extLst xmlns:a="http://schemas.openxmlformats.org/drawingml/2006/main">
               <a:ext uri="{FF2B5EF4-FFF2-40B4-BE49-F238E27FC236}">
-                <a16:creationId xmlns:a16="http://schemas.microsoft.com/office/drawing/2014/main" id="{F5857B6C-7396-4B84-A728-0E83F2F3E66C}"/>
+                <a16:creationId xmlns:a16="http://schemas.microsoft.com/office/drawing/2014/main" id="{9A5B073A-B27F-405D-B5D0-BDEFCD25C639}"/>
               </a:ext>
             </a:extLst>
           </p:cNvPr>
@@ -3190,7 +3190,7 @@
           <p:cNvPr id="14" name="bullet-copy-3">
             <a:extLst xmlns:a="http://schemas.openxmlformats.org/drawingml/2006/main">
               <a:ext uri="{FF2B5EF4-FFF2-40B4-BE49-F238E27FC236}">
-                <a16:creationId xmlns:a16="http://schemas.microsoft.com/office/drawing/2014/main" id="{B983BEBA-DE37-40B0-BC10-A8FE7E3FEF50}"/>
+                <a16:creationId xmlns:a16="http://schemas.microsoft.com/office/drawing/2014/main" id="{7897C847-0A05-4BA5-A34B-76FBCBFE1874}"/>
               </a:ext>
             </a:extLst>
           </p:cNvPr>
@@ -3230,7 +3230,7 @@
                   <a:srgbClr val="16343A"/>
                 </a:solidFill>
               </a:rPr>
-              <a:t>Their impacts depend on material, production, transport, use, collection and what happens after disposal.</a:t>
+              <a:t>The strongest action targets a frequent item, suits the user and includes a routine for washing, returning or storing the replacement so that reuse actually occurs.</a:t>
             </a:r>
           </a:p>
         </p:txBody>
@@ -3238,7 +3238,7 @@
     </p:spTree>
     <p:extLst>
       <p:ext uri="{BB962C8B-B14F-4D97-AF65-F5344CB8AC3E}">
-        <p14:creationId xmlns:p14="http://schemas.microsoft.com/office/powerpoint/2010/main" val="2145154758"/>
+        <p14:creationId xmlns:p14="http://schemas.microsoft.com/office/powerpoint/2010/main" val="1395255649"/>
       </p:ext>
     </p:extLst>
   </p:cSld>
@@ -3269,7 +3269,7 @@
           <p:cNvPr id="12" name="top-rule">
             <a:extLst xmlns:a="http://schemas.openxmlformats.org/drawingml/2006/main">
               <a:ext uri="{FF2B5EF4-FFF2-40B4-BE49-F238E27FC236}">
-                <a16:creationId xmlns:a16="http://schemas.microsoft.com/office/drawing/2014/main" id="{C8E54D02-F61A-412A-9B27-52CF89818253}"/>
+                <a16:creationId xmlns:a16="http://schemas.microsoft.com/office/drawing/2014/main" id="{43F6E310-0832-464D-8DEA-B8D03E204911}"/>
               </a:ext>
             </a:extLst>
           </p:cNvPr>
@@ -3300,7 +3300,7 @@
           <p:cNvPr id="2" name="course-label">
             <a:extLst xmlns:a="http://schemas.openxmlformats.org/drawingml/2006/main">
               <a:ext uri="{FF2B5EF4-FFF2-40B4-BE49-F238E27FC236}">
-                <a16:creationId xmlns:a16="http://schemas.microsoft.com/office/drawing/2014/main" id="{352A2BEB-11DF-4FE4-9AFF-12C8091F5A70}"/>
+                <a16:creationId xmlns:a16="http://schemas.microsoft.com/office/drawing/2014/main" id="{256DD75C-E679-49F7-B12D-17C0C5E944FD}"/>
               </a:ext>
             </a:extLst>
           </p:cNvPr>
@@ -3350,7 +3350,7 @@
           <p:cNvPr id="3" name="module-label">
             <a:extLst xmlns:a="http://schemas.openxmlformats.org/drawingml/2006/main">
               <a:ext uri="{FF2B5EF4-FFF2-40B4-BE49-F238E27FC236}">
-                <a16:creationId xmlns:a16="http://schemas.microsoft.com/office/drawing/2014/main" id="{207E8CF3-561C-4947-AD7E-F4E4D0F97996}"/>
+                <a16:creationId xmlns:a16="http://schemas.microsoft.com/office/drawing/2014/main" id="{D9AFAD73-3998-408E-B64C-4AFF38673DF1}"/>
               </a:ext>
             </a:extLst>
           </p:cNvPr>
@@ -3400,7 +3400,7 @@
           <p:cNvPr id="4" name="slide-title">
             <a:extLst xmlns:a="http://schemas.openxmlformats.org/drawingml/2006/main">
               <a:ext uri="{FF2B5EF4-FFF2-40B4-BE49-F238E27FC236}">
-                <a16:creationId xmlns:a16="http://schemas.microsoft.com/office/drawing/2014/main" id="{614837C5-9CF9-4C5C-8756-94483AD6C4B8}"/>
+                <a16:creationId xmlns:a16="http://schemas.microsoft.com/office/drawing/2014/main" id="{F783DF7B-5C65-4ABE-88E6-DC9C8851DA22}"/>
               </a:ext>
             </a:extLst>
           </p:cNvPr>
@@ -3450,7 +3450,7 @@
           <p:cNvPr id="5" name="slide-subtitle">
             <a:extLst xmlns:a="http://schemas.openxmlformats.org/drawingml/2006/main">
               <a:ext uri="{FF2B5EF4-FFF2-40B4-BE49-F238E27FC236}">
-                <a16:creationId xmlns:a16="http://schemas.microsoft.com/office/drawing/2014/main" id="{76EAB4B1-C4FF-425A-988B-9A211DBE768B}"/>
+                <a16:creationId xmlns:a16="http://schemas.microsoft.com/office/drawing/2014/main" id="{B0252659-D902-4820-B4C8-E87B0CB4B450}"/>
               </a:ext>
             </a:extLst>
           </p:cNvPr>
@@ -3500,7 +3500,7 @@
           <p:cNvPr id="6" name="prompt-accent">
             <a:extLst xmlns:a="http://schemas.openxmlformats.org/drawingml/2006/main">
               <a:ext uri="{FF2B5EF4-FFF2-40B4-BE49-F238E27FC236}">
-                <a16:creationId xmlns:a16="http://schemas.microsoft.com/office/drawing/2014/main" id="{089DCD37-67BE-4190-A103-19D01E05ADA1}"/>
+                <a16:creationId xmlns:a16="http://schemas.microsoft.com/office/drawing/2014/main" id="{12838C2C-B362-452E-B158-95752E528C7A}"/>
               </a:ext>
             </a:extLst>
           </p:cNvPr>
@@ -3531,7 +3531,7 @@
           <p:cNvPr id="7" name="plain-language">
             <a:extLst xmlns:a="http://schemas.openxmlformats.org/drawingml/2006/main">
               <a:ext uri="{FF2B5EF4-FFF2-40B4-BE49-F238E27FC236}">
-                <a16:creationId xmlns:a16="http://schemas.microsoft.com/office/drawing/2014/main" id="{34B3396B-E8AE-44AD-ACD2-606750E6AAB6}"/>
+                <a16:creationId xmlns:a16="http://schemas.microsoft.com/office/drawing/2014/main" id="{5A955FAB-A67A-4645-A701-DB46FED79320}"/>
               </a:ext>
             </a:extLst>
           </p:cNvPr>
@@ -3581,7 +3581,7 @@
           <p:cNvPr id="8" name="clarify">
             <a:extLst xmlns:a="http://schemas.openxmlformats.org/drawingml/2006/main">
               <a:ext uri="{FF2B5EF4-FFF2-40B4-BE49-F238E27FC236}">
-                <a16:creationId xmlns:a16="http://schemas.microsoft.com/office/drawing/2014/main" id="{A51C86CD-43F7-42C1-A356-353851F12BC6}"/>
+                <a16:creationId xmlns:a16="http://schemas.microsoft.com/office/drawing/2014/main" id="{74D1022C-51AA-44E8-9604-03E0E2128EDF}"/>
               </a:ext>
             </a:extLst>
           </p:cNvPr>
@@ -3631,7 +3631,7 @@
           <p:cNvPr id="9" name="starter-label">
             <a:extLst xmlns:a="http://schemas.openxmlformats.org/drawingml/2006/main">
               <a:ext uri="{FF2B5EF4-FFF2-40B4-BE49-F238E27FC236}">
-                <a16:creationId xmlns:a16="http://schemas.microsoft.com/office/drawing/2014/main" id="{69FBB0D7-0F5F-4F25-8224-1AC8B27ED365}"/>
+                <a16:creationId xmlns:a16="http://schemas.microsoft.com/office/drawing/2014/main" id="{55171008-1AA7-4BC3-A530-61B558751A25}"/>
               </a:ext>
             </a:extLst>
           </p:cNvPr>
@@ -3681,7 +3681,7 @@
           <p:cNvPr id="10" name="starter">
             <a:extLst xmlns:a="http://schemas.openxmlformats.org/drawingml/2006/main">
               <a:ext uri="{FF2B5EF4-FFF2-40B4-BE49-F238E27FC236}">
-                <a16:creationId xmlns:a16="http://schemas.microsoft.com/office/drawing/2014/main" id="{D71ACCB3-75C4-4CA2-864A-32EBBA2F32CD}"/>
+                <a16:creationId xmlns:a16="http://schemas.microsoft.com/office/drawing/2014/main" id="{FF765CD5-7459-4B4D-B4C9-F3AE1866EE13}"/>
               </a:ext>
             </a:extLst>
           </p:cNvPr>
@@ -3731,7 +3731,7 @@
           <p:cNvPr id="11" name="action">
             <a:extLst xmlns:a="http://schemas.openxmlformats.org/drawingml/2006/main">
               <a:ext uri="{FF2B5EF4-FFF2-40B4-BE49-F238E27FC236}">
-                <a16:creationId xmlns:a16="http://schemas.microsoft.com/office/drawing/2014/main" id="{49E489CC-EB7F-4C01-AE88-A68F3182B719}"/>
+                <a16:creationId xmlns:a16="http://schemas.microsoft.com/office/drawing/2014/main" id="{72C24D76-E094-409B-8595-1D1C7CC19D56}"/>
               </a:ext>
             </a:extLst>
           </p:cNvPr>
@@ -3779,7 +3779,7 @@
     </p:spTree>
     <p:extLst>
       <p:ext uri="{BB962C8B-B14F-4D97-AF65-F5344CB8AC3E}">
-        <p14:creationId xmlns:p14="http://schemas.microsoft.com/office/powerpoint/2010/main" val="1587370373"/>
+        <p14:creationId xmlns:p14="http://schemas.microsoft.com/office/powerpoint/2010/main" val="371563228"/>
       </p:ext>
     </p:extLst>
   </p:cSld>
@@ -3810,7 +3810,7 @@
           <p:cNvPr id="15" name="top-rule">
             <a:extLst xmlns:a="http://schemas.openxmlformats.org/drawingml/2006/main">
               <a:ext uri="{FF2B5EF4-FFF2-40B4-BE49-F238E27FC236}">
-                <a16:creationId xmlns:a16="http://schemas.microsoft.com/office/drawing/2014/main" id="{26AA7B0F-E45C-4503-830C-182EC20B68CB}"/>
+                <a16:creationId xmlns:a16="http://schemas.microsoft.com/office/drawing/2014/main" id="{68471194-7223-464F-BE89-B36B33024CC7}"/>
               </a:ext>
             </a:extLst>
           </p:cNvPr>
@@ -3841,7 +3841,7 @@
           <p:cNvPr id="2" name="course-label">
             <a:extLst xmlns:a="http://schemas.openxmlformats.org/drawingml/2006/main">
               <a:ext uri="{FF2B5EF4-FFF2-40B4-BE49-F238E27FC236}">
-                <a16:creationId xmlns:a16="http://schemas.microsoft.com/office/drawing/2014/main" id="{6992D9FF-E699-4AAE-8840-F8EC066E21DA}"/>
+                <a16:creationId xmlns:a16="http://schemas.microsoft.com/office/drawing/2014/main" id="{022E4FE9-87B8-4851-B9AC-C9446F01D24F}"/>
               </a:ext>
             </a:extLst>
           </p:cNvPr>
@@ -3891,7 +3891,7 @@
           <p:cNvPr id="3" name="module-label">
             <a:extLst xmlns:a="http://schemas.openxmlformats.org/drawingml/2006/main">
               <a:ext uri="{FF2B5EF4-FFF2-40B4-BE49-F238E27FC236}">
-                <a16:creationId xmlns:a16="http://schemas.microsoft.com/office/drawing/2014/main" id="{CB13D9D7-045E-4F0C-B322-803EBADF2E1A}"/>
+                <a16:creationId xmlns:a16="http://schemas.microsoft.com/office/drawing/2014/main" id="{062F1EBE-3C91-42D1-8A72-F748B49B998F}"/>
               </a:ext>
             </a:extLst>
           </p:cNvPr>
@@ -3941,7 +3941,7 @@
           <p:cNvPr id="4" name="slide-title">
             <a:extLst xmlns:a="http://schemas.openxmlformats.org/drawingml/2006/main">
               <a:ext uri="{FF2B5EF4-FFF2-40B4-BE49-F238E27FC236}">
-                <a16:creationId xmlns:a16="http://schemas.microsoft.com/office/drawing/2014/main" id="{E4AB94E3-3B36-4F03-A15C-28E96C792CA5}"/>
+                <a16:creationId xmlns:a16="http://schemas.microsoft.com/office/drawing/2014/main" id="{5CE33DB0-EA4A-425B-85A5-2EF46711D307}"/>
               </a:ext>
             </a:extLst>
           </p:cNvPr>
@@ -3991,7 +3991,7 @@
           <p:cNvPr id="5" name="slide-subtitle">
             <a:extLst xmlns:a="http://schemas.openxmlformats.org/drawingml/2006/main">
               <a:ext uri="{FF2B5EF4-FFF2-40B4-BE49-F238E27FC236}">
-                <a16:creationId xmlns:a16="http://schemas.microsoft.com/office/drawing/2014/main" id="{2C60230B-7FFB-4421-9F3A-4F67CC2F9A2F}"/>
+                <a16:creationId xmlns:a16="http://schemas.microsoft.com/office/drawing/2014/main" id="{3997F4D0-C21F-4C9D-8531-74A53613222C}"/>
               </a:ext>
             </a:extLst>
           </p:cNvPr>
@@ -4041,7 +4041,7 @@
           <p:cNvPr id="6" name="bullet-1">
             <a:extLst xmlns:a="http://schemas.openxmlformats.org/drawingml/2006/main">
               <a:ext uri="{FF2B5EF4-FFF2-40B4-BE49-F238E27FC236}">
-                <a16:creationId xmlns:a16="http://schemas.microsoft.com/office/drawing/2014/main" id="{3258E390-2851-4442-882B-E45A99CFCBA1}"/>
+                <a16:creationId xmlns:a16="http://schemas.microsoft.com/office/drawing/2014/main" id="{5671C630-CC40-49CC-8118-A095768EEFBB}"/>
               </a:ext>
             </a:extLst>
           </p:cNvPr>
@@ -4072,7 +4072,7 @@
           <p:cNvPr id="7" name="bullet-number-1">
             <a:extLst xmlns:a="http://schemas.openxmlformats.org/drawingml/2006/main">
               <a:ext uri="{FF2B5EF4-FFF2-40B4-BE49-F238E27FC236}">
-                <a16:creationId xmlns:a16="http://schemas.microsoft.com/office/drawing/2014/main" id="{706DA6D6-DFE6-4A72-A189-78DBAB258909}"/>
+                <a16:creationId xmlns:a16="http://schemas.microsoft.com/office/drawing/2014/main" id="{5CBA6E1C-E207-4CD1-8478-5015963BD1B9}"/>
               </a:ext>
             </a:extLst>
           </p:cNvPr>
@@ -4122,7 +4122,7 @@
           <p:cNvPr id="8" name="bullet-copy-1">
             <a:extLst xmlns:a="http://schemas.openxmlformats.org/drawingml/2006/main">
               <a:ext uri="{FF2B5EF4-FFF2-40B4-BE49-F238E27FC236}">
-                <a16:creationId xmlns:a16="http://schemas.microsoft.com/office/drawing/2014/main" id="{36C56C5A-5C5B-4A0B-8A80-A06107A0EAEF}"/>
+                <a16:creationId xmlns:a16="http://schemas.microsoft.com/office/drawing/2014/main" id="{0F811909-E022-4410-8EDC-CE85267D67D7}"/>
               </a:ext>
             </a:extLst>
           </p:cNvPr>
@@ -4172,7 +4172,7 @@
           <p:cNvPr id="9" name="bullet-2">
             <a:extLst xmlns:a="http://schemas.openxmlformats.org/drawingml/2006/main">
               <a:ext uri="{FF2B5EF4-FFF2-40B4-BE49-F238E27FC236}">
-                <a16:creationId xmlns:a16="http://schemas.microsoft.com/office/drawing/2014/main" id="{9A355559-6F01-42F3-9B14-64A2DCED9B46}"/>
+                <a16:creationId xmlns:a16="http://schemas.microsoft.com/office/drawing/2014/main" id="{7B480CC1-1DD6-428A-9606-8685B7E3B2DF}"/>
               </a:ext>
             </a:extLst>
           </p:cNvPr>
@@ -4203,7 +4203,7 @@
           <p:cNvPr id="10" name="bullet-number-2">
             <a:extLst xmlns:a="http://schemas.openxmlformats.org/drawingml/2006/main">
               <a:ext uri="{FF2B5EF4-FFF2-40B4-BE49-F238E27FC236}">
-                <a16:creationId xmlns:a16="http://schemas.microsoft.com/office/drawing/2014/main" id="{B6E9F4CC-F252-471D-A0C2-574690B96198}"/>
+                <a16:creationId xmlns:a16="http://schemas.microsoft.com/office/drawing/2014/main" id="{2ABB8779-D860-4B85-8B74-4BE706896989}"/>
               </a:ext>
             </a:extLst>
           </p:cNvPr>
@@ -4253,7 +4253,7 @@
           <p:cNvPr id="11" name="bullet-copy-2">
             <a:extLst xmlns:a="http://schemas.openxmlformats.org/drawingml/2006/main">
               <a:ext uri="{FF2B5EF4-FFF2-40B4-BE49-F238E27FC236}">
-                <a16:creationId xmlns:a16="http://schemas.microsoft.com/office/drawing/2014/main" id="{D8F6E805-0138-427A-828D-09FF8A520B3F}"/>
+                <a16:creationId xmlns:a16="http://schemas.microsoft.com/office/drawing/2014/main" id="{F38D1FF6-58CD-41B8-BB82-613245E38F80}"/>
               </a:ext>
             </a:extLst>
           </p:cNvPr>
@@ -4293,7 +4293,7 @@
                   <a:srgbClr val="16343A"/>
                 </a:solidFill>
               </a:rPr>
-              <a:t>Designers look for impacts and opportunities at every stage.</a:t>
+              <a:t>Life-cycle decisions are connected.</a:t>
             </a:r>
           </a:p>
         </p:txBody>
@@ -4303,7 +4303,7 @@
           <p:cNvPr id="12" name="bullet-3">
             <a:extLst xmlns:a="http://schemas.openxmlformats.org/drawingml/2006/main">
               <a:ext uri="{FF2B5EF4-FFF2-40B4-BE49-F238E27FC236}">
-                <a16:creationId xmlns:a16="http://schemas.microsoft.com/office/drawing/2014/main" id="{633F8F37-9CE5-4974-898E-83751B1ED4E6}"/>
+                <a16:creationId xmlns:a16="http://schemas.microsoft.com/office/drawing/2014/main" id="{F4EEBE06-6AB9-421B-9F71-53F039C4C120}"/>
               </a:ext>
             </a:extLst>
           </p:cNvPr>
@@ -4334,7 +4334,7 @@
           <p:cNvPr id="13" name="bullet-number-3">
             <a:extLst xmlns:a="http://schemas.openxmlformats.org/drawingml/2006/main">
               <a:ext uri="{FF2B5EF4-FFF2-40B4-BE49-F238E27FC236}">
-                <a16:creationId xmlns:a16="http://schemas.microsoft.com/office/drawing/2014/main" id="{1913E2FD-B587-4569-8344-65F449BCC13E}"/>
+                <a16:creationId xmlns:a16="http://schemas.microsoft.com/office/drawing/2014/main" id="{C2CF4F89-A93F-45CE-81DF-29C9F5AF48E8}"/>
               </a:ext>
             </a:extLst>
           </p:cNvPr>
@@ -4384,7 +4384,7 @@
           <p:cNvPr id="14" name="bullet-copy-3">
             <a:extLst xmlns:a="http://schemas.openxmlformats.org/drawingml/2006/main">
               <a:ext uri="{FF2B5EF4-FFF2-40B4-BE49-F238E27FC236}">
-                <a16:creationId xmlns:a16="http://schemas.microsoft.com/office/drawing/2014/main" id="{363E114C-7730-4E10-9B64-072DC1AEE352}"/>
+                <a16:creationId xmlns:a16="http://schemas.microsoft.com/office/drawing/2014/main" id="{D80AE8F0-7DC1-4628-A8AD-E2D930630F9B}"/>
               </a:ext>
             </a:extLst>
           </p:cNvPr>
@@ -4424,7 +4424,7 @@
                   <a:srgbClr val="16343A"/>
                 </a:solidFill>
               </a:rPr>
-              <a:t>For a lunch bag, durability, washable construction, repairability, efficient material use and long-term user appeal can help extend useful life.</a:t>
+              <a:t>A repairable closure may extend use, while a product that is difficult to clean may be abandoned early.</a:t>
             </a:r>
           </a:p>
         </p:txBody>
@@ -4432,7 +4432,7 @@
     </p:spTree>
     <p:extLst>
       <p:ext uri="{BB962C8B-B14F-4D97-AF65-F5344CB8AC3E}">
-        <p14:creationId xmlns:p14="http://schemas.microsoft.com/office/powerpoint/2010/main" val="156965968"/>
+        <p14:creationId xmlns:p14="http://schemas.microsoft.com/office/powerpoint/2010/main" val="1178368261"/>
       </p:ext>
     </p:extLst>
   </p:cSld>
@@ -4463,7 +4463,7 @@
           <p:cNvPr id="12" name="top-rule">
             <a:extLst xmlns:a="http://schemas.openxmlformats.org/drawingml/2006/main">
               <a:ext uri="{FF2B5EF4-FFF2-40B4-BE49-F238E27FC236}">
-                <a16:creationId xmlns:a16="http://schemas.microsoft.com/office/drawing/2014/main" id="{4D687DFE-F8C7-409A-AEFD-E377720C0376}"/>
+                <a16:creationId xmlns:a16="http://schemas.microsoft.com/office/drawing/2014/main" id="{01D37776-D6CE-446D-B073-8D369670763F}"/>
               </a:ext>
             </a:extLst>
           </p:cNvPr>
@@ -4494,7 +4494,7 @@
           <p:cNvPr id="2" name="course-label">
             <a:extLst xmlns:a="http://schemas.openxmlformats.org/drawingml/2006/main">
               <a:ext uri="{FF2B5EF4-FFF2-40B4-BE49-F238E27FC236}">
-                <a16:creationId xmlns:a16="http://schemas.microsoft.com/office/drawing/2014/main" id="{36B77317-F7AB-4ADF-A553-C892F4DFC535}"/>
+                <a16:creationId xmlns:a16="http://schemas.microsoft.com/office/drawing/2014/main" id="{232981E2-3CF0-4D8B-8724-3637D961B825}"/>
               </a:ext>
             </a:extLst>
           </p:cNvPr>
@@ -4544,7 +4544,7 @@
           <p:cNvPr id="3" name="module-label">
             <a:extLst xmlns:a="http://schemas.openxmlformats.org/drawingml/2006/main">
               <a:ext uri="{FF2B5EF4-FFF2-40B4-BE49-F238E27FC236}">
-                <a16:creationId xmlns:a16="http://schemas.microsoft.com/office/drawing/2014/main" id="{F6A54D2A-45E0-4372-BC22-5AD42D62E3B1}"/>
+                <a16:creationId xmlns:a16="http://schemas.microsoft.com/office/drawing/2014/main" id="{8DA9DB34-915D-453C-84C2-8143D1FD1701}"/>
               </a:ext>
             </a:extLst>
           </p:cNvPr>
@@ -4594,7 +4594,7 @@
           <p:cNvPr id="4" name="slide-title">
             <a:extLst xmlns:a="http://schemas.openxmlformats.org/drawingml/2006/main">
               <a:ext uri="{FF2B5EF4-FFF2-40B4-BE49-F238E27FC236}">
-                <a16:creationId xmlns:a16="http://schemas.microsoft.com/office/drawing/2014/main" id="{0834657D-0AF0-4AC9-A194-F089C180BEDC}"/>
+                <a16:creationId xmlns:a16="http://schemas.microsoft.com/office/drawing/2014/main" id="{92DD3989-2258-43FF-B59D-B7FAC697B900}"/>
               </a:ext>
             </a:extLst>
           </p:cNvPr>
@@ -4644,7 +4644,7 @@
           <p:cNvPr id="5" name="slide-subtitle">
             <a:extLst xmlns:a="http://schemas.openxmlformats.org/drawingml/2006/main">
               <a:ext uri="{FF2B5EF4-FFF2-40B4-BE49-F238E27FC236}">
-                <a16:creationId xmlns:a16="http://schemas.microsoft.com/office/drawing/2014/main" id="{A2D6E428-023F-407F-A824-7F7E3BC00BE4}"/>
+                <a16:creationId xmlns:a16="http://schemas.microsoft.com/office/drawing/2014/main" id="{A297A03C-0C0E-4B9E-A438-593100651018}"/>
               </a:ext>
             </a:extLst>
           </p:cNvPr>
@@ -4694,7 +4694,7 @@
           <p:cNvPr id="6" name="prompt-accent">
             <a:extLst xmlns:a="http://schemas.openxmlformats.org/drawingml/2006/main">
               <a:ext uri="{FF2B5EF4-FFF2-40B4-BE49-F238E27FC236}">
-                <a16:creationId xmlns:a16="http://schemas.microsoft.com/office/drawing/2014/main" id="{5DCE3F24-E547-43F7-8B6E-AB9BFBD523B6}"/>
+                <a16:creationId xmlns:a16="http://schemas.microsoft.com/office/drawing/2014/main" id="{CDED3E15-F23F-48CE-9AB5-0BA0D608897F}"/>
               </a:ext>
             </a:extLst>
           </p:cNvPr>
@@ -4725,7 +4725,7 @@
           <p:cNvPr id="7" name="plain-language">
             <a:extLst xmlns:a="http://schemas.openxmlformats.org/drawingml/2006/main">
               <a:ext uri="{FF2B5EF4-FFF2-40B4-BE49-F238E27FC236}">
-                <a16:creationId xmlns:a16="http://schemas.microsoft.com/office/drawing/2014/main" id="{B6521658-C744-471A-86E5-21CBACB5687A}"/>
+                <a16:creationId xmlns:a16="http://schemas.microsoft.com/office/drawing/2014/main" id="{FFB2DD3A-0E80-4849-9018-A19A569C103E}"/>
               </a:ext>
             </a:extLst>
           </p:cNvPr>
@@ -4775,7 +4775,7 @@
           <p:cNvPr id="8" name="clarify">
             <a:extLst xmlns:a="http://schemas.openxmlformats.org/drawingml/2006/main">
               <a:ext uri="{FF2B5EF4-FFF2-40B4-BE49-F238E27FC236}">
-                <a16:creationId xmlns:a16="http://schemas.microsoft.com/office/drawing/2014/main" id="{01AFA917-E0A8-4C33-AFC4-E7E69C52BD62}"/>
+                <a16:creationId xmlns:a16="http://schemas.microsoft.com/office/drawing/2014/main" id="{E08E301C-809D-44D4-BA47-4167072DA4A4}"/>
               </a:ext>
             </a:extLst>
           </p:cNvPr>
@@ -4825,7 +4825,7 @@
           <p:cNvPr id="9" name="starter-label">
             <a:extLst xmlns:a="http://schemas.openxmlformats.org/drawingml/2006/main">
               <a:ext uri="{FF2B5EF4-FFF2-40B4-BE49-F238E27FC236}">
-                <a16:creationId xmlns:a16="http://schemas.microsoft.com/office/drawing/2014/main" id="{AF9EC73D-58C4-4E73-AAB0-9766AA92D95C}"/>
+                <a16:creationId xmlns:a16="http://schemas.microsoft.com/office/drawing/2014/main" id="{FC4D4B63-3594-4A4A-B56D-6DA9067FF881}"/>
               </a:ext>
             </a:extLst>
           </p:cNvPr>
@@ -4875,7 +4875,7 @@
           <p:cNvPr id="10" name="starter">
             <a:extLst xmlns:a="http://schemas.openxmlformats.org/drawingml/2006/main">
               <a:ext uri="{FF2B5EF4-FFF2-40B4-BE49-F238E27FC236}">
-                <a16:creationId xmlns:a16="http://schemas.microsoft.com/office/drawing/2014/main" id="{A0A6F645-541F-41CB-AA19-1445015F14B3}"/>
+                <a16:creationId xmlns:a16="http://schemas.microsoft.com/office/drawing/2014/main" id="{88681D07-C620-4AB3-941B-141B121FDA3B}"/>
               </a:ext>
             </a:extLst>
           </p:cNvPr>
@@ -4925,7 +4925,7 @@
           <p:cNvPr id="11" name="action">
             <a:extLst xmlns:a="http://schemas.openxmlformats.org/drawingml/2006/main">
               <a:ext uri="{FF2B5EF4-FFF2-40B4-BE49-F238E27FC236}">
-                <a16:creationId xmlns:a16="http://schemas.microsoft.com/office/drawing/2014/main" id="{36F1029B-9F81-4A13-AE0F-A84247C45FD6}"/>
+                <a16:creationId xmlns:a16="http://schemas.microsoft.com/office/drawing/2014/main" id="{2A4BA348-9E27-4A78-981F-95630C642CF9}"/>
               </a:ext>
             </a:extLst>
           </p:cNvPr>
@@ -4973,7 +4973,7 @@
     </p:spTree>
     <p:extLst>
       <p:ext uri="{BB962C8B-B14F-4D97-AF65-F5344CB8AC3E}">
-        <p14:creationId xmlns:p14="http://schemas.microsoft.com/office/powerpoint/2010/main" val="119517089"/>
+        <p14:creationId xmlns:p14="http://schemas.microsoft.com/office/powerpoint/2010/main" val="1806517878"/>
       </p:ext>
     </p:extLst>
   </p:cSld>
@@ -5004,7 +5004,7 @@
           <p:cNvPr id="15" name="top-rule">
             <a:extLst xmlns:a="http://schemas.openxmlformats.org/drawingml/2006/main">
               <a:ext uri="{FF2B5EF4-FFF2-40B4-BE49-F238E27FC236}">
-                <a16:creationId xmlns:a16="http://schemas.microsoft.com/office/drawing/2014/main" id="{4BCC26C8-16E7-468C-8D80-9E3F731500EA}"/>
+                <a16:creationId xmlns:a16="http://schemas.microsoft.com/office/drawing/2014/main" id="{92F549FF-1C3D-4127-8D17-330A99E2632A}"/>
               </a:ext>
             </a:extLst>
           </p:cNvPr>
@@ -5035,7 +5035,7 @@
           <p:cNvPr id="2" name="course-label">
             <a:extLst xmlns:a="http://schemas.openxmlformats.org/drawingml/2006/main">
               <a:ext uri="{FF2B5EF4-FFF2-40B4-BE49-F238E27FC236}">
-                <a16:creationId xmlns:a16="http://schemas.microsoft.com/office/drawing/2014/main" id="{0A277F47-3028-4B86-9E81-9194E277134D}"/>
+                <a16:creationId xmlns:a16="http://schemas.microsoft.com/office/drawing/2014/main" id="{6DF8C63C-649C-4CD3-8C6E-E876C6C36185}"/>
               </a:ext>
             </a:extLst>
           </p:cNvPr>
@@ -5085,7 +5085,7 @@
           <p:cNvPr id="3" name="module-label">
             <a:extLst xmlns:a="http://schemas.openxmlformats.org/drawingml/2006/main">
               <a:ext uri="{FF2B5EF4-FFF2-40B4-BE49-F238E27FC236}">
-                <a16:creationId xmlns:a16="http://schemas.microsoft.com/office/drawing/2014/main" id="{73281F9B-AE57-4808-ACE1-86154AC6C153}"/>
+                <a16:creationId xmlns:a16="http://schemas.microsoft.com/office/drawing/2014/main" id="{FFDA18EE-947A-45E3-94A0-C22480F4B844}"/>
               </a:ext>
             </a:extLst>
           </p:cNvPr>
@@ -5135,7 +5135,7 @@
           <p:cNvPr id="4" name="slide-title">
             <a:extLst xmlns:a="http://schemas.openxmlformats.org/drawingml/2006/main">
               <a:ext uri="{FF2B5EF4-FFF2-40B4-BE49-F238E27FC236}">
-                <a16:creationId xmlns:a16="http://schemas.microsoft.com/office/drawing/2014/main" id="{D306A40C-2E94-42FC-9779-180644CBAD61}"/>
+                <a16:creationId xmlns:a16="http://schemas.microsoft.com/office/drawing/2014/main" id="{F737C864-D57E-4255-BDF3-2BCD896C134F}"/>
               </a:ext>
             </a:extLst>
           </p:cNvPr>
@@ -5185,7 +5185,7 @@
           <p:cNvPr id="5" name="slide-subtitle">
             <a:extLst xmlns:a="http://schemas.openxmlformats.org/drawingml/2006/main">
               <a:ext uri="{FF2B5EF4-FFF2-40B4-BE49-F238E27FC236}">
-                <a16:creationId xmlns:a16="http://schemas.microsoft.com/office/drawing/2014/main" id="{423A27B9-6136-4BBC-BB2F-F8220AFD4046}"/>
+                <a16:creationId xmlns:a16="http://schemas.microsoft.com/office/drawing/2014/main" id="{99D103E8-7BC7-4EE3-8FA0-450A9AC7FA5C}"/>
               </a:ext>
             </a:extLst>
           </p:cNvPr>
@@ -5235,7 +5235,7 @@
           <p:cNvPr id="6" name="bullet-1">
             <a:extLst xmlns:a="http://schemas.openxmlformats.org/drawingml/2006/main">
               <a:ext uri="{FF2B5EF4-FFF2-40B4-BE49-F238E27FC236}">
-                <a16:creationId xmlns:a16="http://schemas.microsoft.com/office/drawing/2014/main" id="{2EF6DFE3-7034-441E-B12C-ACE176C45D5A}"/>
+                <a16:creationId xmlns:a16="http://schemas.microsoft.com/office/drawing/2014/main" id="{9CA5DA13-FA50-4594-B2B0-D6A95BAEA18E}"/>
               </a:ext>
             </a:extLst>
           </p:cNvPr>
@@ -5266,7 +5266,7 @@
           <p:cNvPr id="7" name="bullet-number-1">
             <a:extLst xmlns:a="http://schemas.openxmlformats.org/drawingml/2006/main">
               <a:ext uri="{FF2B5EF4-FFF2-40B4-BE49-F238E27FC236}">
-                <a16:creationId xmlns:a16="http://schemas.microsoft.com/office/drawing/2014/main" id="{8C94D9AB-A187-450D-9A9B-76A9D740FC24}"/>
+                <a16:creationId xmlns:a16="http://schemas.microsoft.com/office/drawing/2014/main" id="{D665B633-AB0A-45E9-A2F5-5F05CEC0FAAF}"/>
               </a:ext>
             </a:extLst>
           </p:cNvPr>
@@ -5316,7 +5316,7 @@
           <p:cNvPr id="8" name="bullet-copy-1">
             <a:extLst xmlns:a="http://schemas.openxmlformats.org/drawingml/2006/main">
               <a:ext uri="{FF2B5EF4-FFF2-40B4-BE49-F238E27FC236}">
-                <a16:creationId xmlns:a16="http://schemas.microsoft.com/office/drawing/2014/main" id="{A05BED8F-ED7E-4BD5-94A5-6D51B1E583C0}"/>
+                <a16:creationId xmlns:a16="http://schemas.microsoft.com/office/drawing/2014/main" id="{F20575F5-F7F3-43C3-863D-C0986D9A758F}"/>
               </a:ext>
             </a:extLst>
           </p:cNvPr>
@@ -5366,7 +5366,7 @@
           <p:cNvPr id="9" name="bullet-2">
             <a:extLst xmlns:a="http://schemas.openxmlformats.org/drawingml/2006/main">
               <a:ext uri="{FF2B5EF4-FFF2-40B4-BE49-F238E27FC236}">
-                <a16:creationId xmlns:a16="http://schemas.microsoft.com/office/drawing/2014/main" id="{4347DA8E-41B5-4BC2-961F-D7D450E961EF}"/>
+                <a16:creationId xmlns:a16="http://schemas.microsoft.com/office/drawing/2014/main" id="{4EB69D9F-E37A-4487-B7C7-4A57F5F4E701}"/>
               </a:ext>
             </a:extLst>
           </p:cNvPr>
@@ -5397,7 +5397,7 @@
           <p:cNvPr id="10" name="bullet-number-2">
             <a:extLst xmlns:a="http://schemas.openxmlformats.org/drawingml/2006/main">
               <a:ext uri="{FF2B5EF4-FFF2-40B4-BE49-F238E27FC236}">
-                <a16:creationId xmlns:a16="http://schemas.microsoft.com/office/drawing/2014/main" id="{EC41B2DE-076B-47D7-B4F8-0BD4786FC1AE}"/>
+                <a16:creationId xmlns:a16="http://schemas.microsoft.com/office/drawing/2014/main" id="{55F3038C-4A09-4A33-9E93-21DD7A68B0C6}"/>
               </a:ext>
             </a:extLst>
           </p:cNvPr>
@@ -5447,7 +5447,7 @@
           <p:cNvPr id="11" name="bullet-copy-2">
             <a:extLst xmlns:a="http://schemas.openxmlformats.org/drawingml/2006/main">
               <a:ext uri="{FF2B5EF4-FFF2-40B4-BE49-F238E27FC236}">
-                <a16:creationId xmlns:a16="http://schemas.microsoft.com/office/drawing/2014/main" id="{AF6ACF52-E12C-44A9-9609-A886CE7D364F}"/>
+                <a16:creationId xmlns:a16="http://schemas.microsoft.com/office/drawing/2014/main" id="{02F74495-ED67-4DA0-81C1-9230CCE8CC3B}"/>
               </a:ext>
             </a:extLst>
           </p:cNvPr>
@@ -5487,7 +5487,7 @@
                   <a:srgbClr val="16343A"/>
                 </a:solidFill>
               </a:rPr>
-              <a:t>Examples include using a reusable lunch bag regularly, replacing disposable wrap with an approved reusable option, planning food portions and caring for products so t…</a:t>
+              <a:t>State the action, the likely effect and the evidence you would collect.</a:t>
             </a:r>
           </a:p>
         </p:txBody>
@@ -5497,7 +5497,7 @@
           <p:cNvPr id="12" name="bullet-3">
             <a:extLst xmlns:a="http://schemas.openxmlformats.org/drawingml/2006/main">
               <a:ext uri="{FF2B5EF4-FFF2-40B4-BE49-F238E27FC236}">
-                <a16:creationId xmlns:a16="http://schemas.microsoft.com/office/drawing/2014/main" id="{C09FBC70-E042-468A-807C-02746DF54007}"/>
+                <a16:creationId xmlns:a16="http://schemas.microsoft.com/office/drawing/2014/main" id="{4538C613-97C3-4BFE-900B-B9EAC075207B}"/>
               </a:ext>
             </a:extLst>
           </p:cNvPr>
@@ -5528,7 +5528,7 @@
           <p:cNvPr id="13" name="bullet-number-3">
             <a:extLst xmlns:a="http://schemas.openxmlformats.org/drawingml/2006/main">
               <a:ext uri="{FF2B5EF4-FFF2-40B4-BE49-F238E27FC236}">
-                <a16:creationId xmlns:a16="http://schemas.microsoft.com/office/drawing/2014/main" id="{95A48034-DC3A-477E-91AC-7F4A1A022769}"/>
+                <a16:creationId xmlns:a16="http://schemas.microsoft.com/office/drawing/2014/main" id="{4DAF130B-55C8-410B-9BF5-83F76E035926}"/>
               </a:ext>
             </a:extLst>
           </p:cNvPr>
@@ -5578,7 +5578,7 @@
           <p:cNvPr id="14" name="bullet-copy-3">
             <a:extLst xmlns:a="http://schemas.openxmlformats.org/drawingml/2006/main">
               <a:ext uri="{FF2B5EF4-FFF2-40B4-BE49-F238E27FC236}">
-                <a16:creationId xmlns:a16="http://schemas.microsoft.com/office/drawing/2014/main" id="{8F191EBA-BC24-4BF4-A6C0-9E8F69DE6457}"/>
+                <a16:creationId xmlns:a16="http://schemas.microsoft.com/office/drawing/2014/main" id="{70CD75E8-B9E6-41C2-AA47-456E6D98196D}"/>
               </a:ext>
             </a:extLst>
           </p:cNvPr>
@@ -5618,7 +5618,7 @@
                   <a:srgbClr val="16343A"/>
                 </a:solidFill>
               </a:rPr>
-              <a:t>Avoid vague claims such as “this saves the planet”.</a:t>
+              <a:t>For example, a student might count disposable carrier bags for one week, use the reusable bag for four weeks and compare the two records.</a:t>
             </a:r>
           </a:p>
         </p:txBody>
@@ -5626,7 +5626,7 @@
     </p:spTree>
     <p:extLst>
       <p:ext uri="{BB962C8B-B14F-4D97-AF65-F5344CB8AC3E}">
-        <p14:creationId xmlns:p14="http://schemas.microsoft.com/office/powerpoint/2010/main" val="1179678607"/>
+        <p14:creationId xmlns:p14="http://schemas.microsoft.com/office/powerpoint/2010/main" val="810044475"/>
       </p:ext>
     </p:extLst>
   </p:cSld>
@@ -5657,7 +5657,7 @@
           <p:cNvPr id="6" name="closing-rule">
             <a:extLst xmlns:a="http://schemas.openxmlformats.org/drawingml/2006/main">
               <a:ext uri="{FF2B5EF4-FFF2-40B4-BE49-F238E27FC236}">
-                <a16:creationId xmlns:a16="http://schemas.microsoft.com/office/drawing/2014/main" id="{06B4F338-8E74-4275-B415-102450F80E3C}"/>
+                <a16:creationId xmlns:a16="http://schemas.microsoft.com/office/drawing/2014/main" id="{D2381E76-0B9E-4EEA-AE04-9DFD475F11C1}"/>
               </a:ext>
             </a:extLst>
           </p:cNvPr>
@@ -5688,7 +5688,7 @@
           <p:cNvPr id="2" name="closing-kicker">
             <a:extLst xmlns:a="http://schemas.openxmlformats.org/drawingml/2006/main">
               <a:ext uri="{FF2B5EF4-FFF2-40B4-BE49-F238E27FC236}">
-                <a16:creationId xmlns:a16="http://schemas.microsoft.com/office/drawing/2014/main" id="{DEA66BAC-D8A2-4901-85E0-7395EBC0A26B}"/>
+                <a16:creationId xmlns:a16="http://schemas.microsoft.com/office/drawing/2014/main" id="{C890975D-639B-4AA0-B4C4-D1349DDAD16D}"/>
               </a:ext>
             </a:extLst>
           </p:cNvPr>
@@ -5738,7 +5738,7 @@
           <p:cNvPr id="3" name="closing-title">
             <a:extLst xmlns:a="http://schemas.openxmlformats.org/drawingml/2006/main">
               <a:ext uri="{FF2B5EF4-FFF2-40B4-BE49-F238E27FC236}">
-                <a16:creationId xmlns:a16="http://schemas.microsoft.com/office/drawing/2014/main" id="{E9A1F781-FB9F-4ED2-816C-D60F65FDC103}"/>
+                <a16:creationId xmlns:a16="http://schemas.microsoft.com/office/drawing/2014/main" id="{111EAD3A-C93B-4965-820E-0BE02851D8D4}"/>
               </a:ext>
             </a:extLst>
           </p:cNvPr>
@@ -5788,7 +5788,7 @@
           <p:cNvPr id="4" name="closing-copy">
             <a:extLst xmlns:a="http://schemas.openxmlformats.org/drawingml/2006/main">
               <a:ext uri="{FF2B5EF4-FFF2-40B4-BE49-F238E27FC236}">
-                <a16:creationId xmlns:a16="http://schemas.microsoft.com/office/drawing/2014/main" id="{0723AB6A-0217-49B5-8A65-9B7AD6176E36}"/>
+                <a16:creationId xmlns:a16="http://schemas.microsoft.com/office/drawing/2014/main" id="{BB7DF94C-CB6F-40D2-BD92-ED149C2BA57F}"/>
               </a:ext>
             </a:extLst>
           </p:cNvPr>
@@ -5862,7 +5862,7 @@
                   <a:srgbClr val="E6F2EF"/>
                 </a:solidFill>
               </a:rPr>
-              <a:t>3. Continue Project Activity 3 and keep authentic evidence.</a:t>
+              <a:t>3. Continue the Lunch-waste action investigation and keep authentic evidence.</a:t>
             </a:r>
           </a:p>
         </p:txBody>
@@ -5872,7 +5872,7 @@
           <p:cNvPr id="5" name="closing-boundary">
             <a:extLst xmlns:a="http://schemas.openxmlformats.org/drawingml/2006/main">
               <a:ext uri="{FF2B5EF4-FFF2-40B4-BE49-F238E27FC236}">
-                <a16:creationId xmlns:a16="http://schemas.microsoft.com/office/drawing/2014/main" id="{5D55A254-3FAC-42CC-B2E1-18BDB005FA3E}"/>
+                <a16:creationId xmlns:a16="http://schemas.microsoft.com/office/drawing/2014/main" id="{EEAECB55-EAD0-4170-A8F0-14D59DF37871}"/>
               </a:ext>
             </a:extLst>
           </p:cNvPr>
@@ -5920,7 +5920,7 @@
     </p:spTree>
     <p:extLst>
       <p:ext uri="{BB962C8B-B14F-4D97-AF65-F5344CB8AC3E}">
-        <p14:creationId xmlns:p14="http://schemas.microsoft.com/office/powerpoint/2010/main" val="1852388701"/>
+        <p14:creationId xmlns:p14="http://schemas.microsoft.com/office/powerpoint/2010/main" val="518261385"/>
       </p:ext>
     </p:extLst>
   </p:cSld>
